--- a/SKAIDRES_bendros_sablonas-LT_Arial_su_projekto_skaidremis_v3.pptx
+++ b/SKAIDRES_bendros_sablonas-LT_Arial_su_projekto_skaidremis_v3.pptx
@@ -7,10 +7,10 @@
     <p:sldMasterId id="2147483707" r:id="rId3"/>
   </p:sldMasterIdLst>
   <p:notesMasterIdLst>
-    <p:notesMasterId r:id="rId19"/>
+    <p:notesMasterId r:id="rId20"/>
   </p:notesMasterIdLst>
   <p:handoutMasterIdLst>
-    <p:handoutMasterId r:id="rId20"/>
+    <p:handoutMasterId r:id="rId21"/>
   </p:handoutMasterIdLst>
   <p:sldIdLst>
     <p:sldId id="256" r:id="rId4"/>
@@ -28,6 +28,7 @@
     <p:sldId id="307" r:id="rId16"/>
     <p:sldId id="300" r:id="rId17"/>
     <p:sldId id="301" r:id="rId18"/>
+    <p:sldId id="308" r:id="rId19"/>
   </p:sldIdLst>
   <p:sldSz cx="12192000" cy="6858000"/>
   <p:notesSz cx="6858000" cy="9144000"/>
@@ -146,6 +147,7 @@
             <p14:sldId id="307"/>
             <p14:sldId id="300"/>
             <p14:sldId id="301"/>
+            <p14:sldId id="308"/>
           </p14:sldIdLst>
         </p14:section>
         <p14:section name="Untitled Section" id="{83D1448D-D278-4876-A239-077D70560EA3}">
@@ -34226,6 +34228,10 @@
               <a:rPr lang="lt-LT" dirty="0" smtClean="0"/>
               <a:t>Išvados</a:t>
             </a:r>
+            <a:r>
+              <a:rPr lang="en-US" dirty="0" smtClean="0"/>
+              <a:t> (1)</a:t>
+            </a:r>
             <a:endParaRPr lang="en-US" dirty="0"/>
           </a:p>
           <a:p>
@@ -34455,7 +34461,7 @@
         <p:spPr>
           <a:xfrm>
             <a:off x="641645" y="1690277"/>
-            <a:ext cx="10839155" cy="4276777"/>
+            <a:ext cx="10839155" cy="4961215"/>
           </a:xfrm>
           <a:prstGeom prst="rect">
             <a:avLst/>
@@ -34631,54 +34637,85 @@
             </a:lvl9pPr>
           </a:lstStyle>
           <a:p>
+            <a:pPr marL="342900" indent="-342900">
+              <a:buFont typeface="Arial" panose="020B0604020202020204" pitchFamily="34" charset="0"/>
+              <a:buChar char="•"/>
+            </a:pPr>
             <a:r>
               <a:rPr lang="lt-LT" dirty="0">
                 <a:solidFill>
                   <a:schemeClr val="tx1"/>
                 </a:solidFill>
               </a:rPr>
-              <a:t>Išanalizavus krepšinio turnyrų organizavimo procesą nustatyta, kad pagrindinė problema kyla dėl turnyro duomenų išskaidymo tarp skirtingų priemonių.</a:t>
-            </a:r>
+              <a:t>Išanalizavus turnyrų organizavimo procesą nustatyta, kad pagrindinė problema yra duomenų išskaidymas tarp skirtingų priemonių. Komandų sąrašai, paraiškos, tvarkaraštis, rezultatai ir turnyrinės lentelės yra susiję, todėl jų valdymas vienoje sistemoje sumažina rankinio derinimo poreikį</a:t>
+            </a:r>
+            <a:r>
+              <a:rPr lang="lt-LT" dirty="0" smtClean="0">
+                <a:solidFill>
+                  <a:schemeClr val="tx1"/>
+                </a:solidFill>
+              </a:rPr>
+              <a:t>.</a:t>
+            </a:r>
+            <a:endParaRPr lang="lt-LT" dirty="0">
+              <a:solidFill>
+                <a:schemeClr val="tx1"/>
+              </a:solidFill>
+            </a:endParaRPr>
           </a:p>
           <a:p>
+            <a:pPr marL="342900" indent="-342900">
+              <a:buFont typeface="Arial" panose="020B0604020202020204" pitchFamily="34" charset="0"/>
+              <a:buChar char="•"/>
+            </a:pPr>
             <a:r>
               <a:rPr lang="lt-LT" dirty="0">
                 <a:solidFill>
                   <a:schemeClr val="tx1"/>
                 </a:solidFill>
               </a:rPr>
-              <a:t>Panašių sprendimų analizė parodė, kad kuriamoje sistemoje svarbu akcentuoti mažesniems ir vidutinio dydžio krepšinio turnyrams aktualų paraiškų, tvarkaraščio, rezultatų, lentelės ir atkrintamųjų valdymą.</a:t>
-            </a:r>
+              <a:t>Panašių sprendimų analizė parodė, kad esami įrankiai turi naudingų funkcijų, tačiau dažnai yra orientuoti į bendresnį arba didesnio masto renginių valdymą. Dėl to kuriamoje sistemoje akcentuotas mažesnių ir vidutinio dydžio krepšinio turnyrų valdymas</a:t>
+            </a:r>
+            <a:r>
+              <a:rPr lang="lt-LT" dirty="0" smtClean="0">
+                <a:solidFill>
+                  <a:schemeClr val="tx1"/>
+                </a:solidFill>
+              </a:rPr>
+              <a:t>.</a:t>
+            </a:r>
+            <a:endParaRPr lang="lt-LT" dirty="0">
+              <a:solidFill>
+                <a:schemeClr val="tx1"/>
+              </a:solidFill>
+            </a:endParaRPr>
           </a:p>
           <a:p>
+            <a:pPr marL="342900" indent="-342900">
+              <a:buFont typeface="Arial" panose="020B0604020202020204" pitchFamily="34" charset="0"/>
+              <a:buChar char="•"/>
+            </a:pPr>
             <a:r>
               <a:rPr lang="lt-LT" dirty="0">
                 <a:solidFill>
                   <a:schemeClr val="tx1"/>
                 </a:solidFill>
               </a:rPr>
-              <a:t>Reikalavimų analizės metu išskirti trys naudotojų tipai: neprisijungęs naudotojas, komandos vadovas ir administratorius.</a:t>
-            </a:r>
-          </a:p>
-          <a:p>
-            <a:r>
-              <a:rPr lang="lt-LT" dirty="0">
+              <a:t>Reikalavimų analizės metu išskirti trys pagrindiniai naudotojų tipai: neprisijungęs naudotojas, komandos vadovas ir administratorius. Toks atskyrimas leido aiškiai apibrėžti viešus veiksmus, komandos vadovo funkcijas ir administratoriaus atsakomybes</a:t>
+            </a:r>
+            <a:r>
+              <a:rPr lang="lt-LT" dirty="0" smtClean="0">
                 <a:solidFill>
                   <a:schemeClr val="tx1"/>
                 </a:solidFill>
               </a:rPr>
-              <a:t>Sistema padalyta į naudotojo sąsają, serverio dalį ir duomenų bazę, todėl aiškiai atskirtos pagrindinės turnyro valdymo atsakomybės.</a:t>
-            </a:r>
-          </a:p>
-          <a:p>
-            <a:r>
-              <a:rPr lang="lt-LT" dirty="0">
-                <a:solidFill>
-                  <a:schemeClr val="tx1"/>
-                </a:solidFill>
-              </a:rPr>
-              <a:t>Sukurta sistema leidžia vienoje vietoje valdyti turnyrus, komandas, paraiškas, tvarkaraštį, rungtynių rezultatus, turnyrines lenteles ir atkrintamųjų eigą.</a:t>
-            </a:r>
+              <a:t>.</a:t>
+            </a:r>
+            <a:endParaRPr lang="lt-LT" dirty="0">
+              <a:solidFill>
+                <a:schemeClr val="tx1"/>
+              </a:solidFill>
+            </a:endParaRPr>
           </a:p>
         </p:txBody>
       </p:sp>
@@ -34686,6 +34723,739 @@
     <p:extLst>
       <p:ext uri="{BB962C8B-B14F-4D97-AF65-F5344CB8AC3E}">
         <p14:creationId xmlns:p14="http://schemas.microsoft.com/office/powerpoint/2010/main" val="3141649029"/>
+      </p:ext>
+    </p:extLst>
+  </p:cSld>
+  <p:clrMapOvr>
+    <a:masterClrMapping/>
+  </p:clrMapOvr>
+  <p:timing>
+    <p:tnLst>
+      <p:par>
+        <p:cTn id="1" dur="indefinite" restart="never" nodeType="tmRoot"/>
+      </p:par>
+    </p:tnLst>
+  </p:timing>
+</p:sld>
+</file>
+
+<file path=ppt/slides/slide16.xml><?xml version="1.0" encoding="utf-8"?>
+<p:sld xmlns:a="http://schemas.openxmlformats.org/drawingml/2006/main" xmlns:r="http://schemas.openxmlformats.org/officeDocument/2006/relationships" xmlns:p="http://schemas.openxmlformats.org/presentationml/2006/main">
+  <p:cSld>
+    <p:spTree>
+      <p:nvGrpSpPr>
+        <p:cNvPr id="1" name=""/>
+        <p:cNvGrpSpPr/>
+        <p:nvPr/>
+      </p:nvGrpSpPr>
+      <p:grpSpPr>
+        <a:xfrm>
+          <a:off x="0" y="0"/>
+          <a:ext cx="0" cy="0"/>
+          <a:chOff x="0" y="0"/>
+          <a:chExt cx="0" cy="0"/>
+        </a:xfrm>
+      </p:grpSpPr>
+      <p:sp>
+        <p:nvSpPr>
+          <p:cNvPr id="2" name="Text Placeholder 4">
+            <a:extLst>
+              <a:ext uri="{FF2B5EF4-FFF2-40B4-BE49-F238E27FC236}">
+                <a16:creationId xmlns:a16="http://schemas.microsoft.com/office/drawing/2014/main" id="{DBF20611-ABA6-D94A-8015-2668F79C7DCB}"/>
+              </a:ext>
+            </a:extLst>
+          </p:cNvPr>
+          <p:cNvSpPr txBox="1">
+            <a:spLocks/>
+          </p:cNvSpPr>
+          <p:nvPr/>
+        </p:nvSpPr>
+        <p:spPr>
+          <a:xfrm>
+            <a:off x="641645" y="600737"/>
+            <a:ext cx="8978606" cy="509636"/>
+          </a:xfrm>
+          <a:prstGeom prst="rect">
+            <a:avLst/>
+          </a:prstGeom>
+        </p:spPr>
+        <p:txBody>
+          <a:bodyPr/>
+          <a:lstStyle>
+            <a:lvl1pPr marL="0" indent="0" algn="l" defTabSz="914400" rtl="0" eaLnBrk="1" latinLnBrk="0" hangingPunct="1">
+              <a:lnSpc>
+                <a:spcPct val="90000"/>
+              </a:lnSpc>
+              <a:spcBef>
+                <a:spcPts val="1000"/>
+              </a:spcBef>
+              <a:buFont typeface="Arial" panose="020B0604020202020204" pitchFamily="34" charset="0"/>
+              <a:buNone/>
+              <a:defRPr sz="3000" b="1" i="0" kern="1200">
+                <a:solidFill>
+                  <a:srgbClr val="FFFF00"/>
+                </a:solidFill>
+                <a:latin typeface="Arial" panose="020B0604020202020204" pitchFamily="34" charset="0"/>
+                <a:ea typeface="Inter Semi Bold" panose="020B0502030000000004" pitchFamily="34" charset="0"/>
+                <a:cs typeface="Arial" panose="020B0604020202020204" pitchFamily="34" charset="0"/>
+              </a:defRPr>
+            </a:lvl1pPr>
+            <a:lvl2pPr marL="685800" indent="-228600" algn="l" defTabSz="914400" rtl="0" eaLnBrk="1" latinLnBrk="0" hangingPunct="1">
+              <a:lnSpc>
+                <a:spcPct val="90000"/>
+              </a:lnSpc>
+              <a:spcBef>
+                <a:spcPts val="500"/>
+              </a:spcBef>
+              <a:buFont typeface="Arial" panose="020B0604020202020204" pitchFamily="34" charset="0"/>
+              <a:buChar char="•"/>
+              <a:defRPr sz="2400" kern="1200">
+                <a:solidFill>
+                  <a:schemeClr val="bg1"/>
+                </a:solidFill>
+                <a:latin typeface="+mn-lt"/>
+                <a:ea typeface="+mn-ea"/>
+                <a:cs typeface="+mn-cs"/>
+              </a:defRPr>
+            </a:lvl2pPr>
+            <a:lvl3pPr marL="1143000" indent="-228600" algn="l" defTabSz="914400" rtl="0" eaLnBrk="1" latinLnBrk="0" hangingPunct="1">
+              <a:lnSpc>
+                <a:spcPct val="90000"/>
+              </a:lnSpc>
+              <a:spcBef>
+                <a:spcPts val="500"/>
+              </a:spcBef>
+              <a:buFont typeface="Arial" panose="020B0604020202020204" pitchFamily="34" charset="0"/>
+              <a:buChar char="•"/>
+              <a:defRPr sz="2000" kern="1200">
+                <a:solidFill>
+                  <a:schemeClr val="bg1"/>
+                </a:solidFill>
+                <a:latin typeface="+mn-lt"/>
+                <a:ea typeface="+mn-ea"/>
+                <a:cs typeface="+mn-cs"/>
+              </a:defRPr>
+            </a:lvl3pPr>
+            <a:lvl4pPr marL="1600200" indent="-228600" algn="l" defTabSz="914400" rtl="0" eaLnBrk="1" latinLnBrk="0" hangingPunct="1">
+              <a:lnSpc>
+                <a:spcPct val="90000"/>
+              </a:lnSpc>
+              <a:spcBef>
+                <a:spcPts val="500"/>
+              </a:spcBef>
+              <a:buFont typeface="Arial" panose="020B0604020202020204" pitchFamily="34" charset="0"/>
+              <a:buChar char="•"/>
+              <a:defRPr sz="1800" kern="1200">
+                <a:solidFill>
+                  <a:schemeClr val="bg1"/>
+                </a:solidFill>
+                <a:latin typeface="+mn-lt"/>
+                <a:ea typeface="+mn-ea"/>
+                <a:cs typeface="+mn-cs"/>
+              </a:defRPr>
+            </a:lvl4pPr>
+            <a:lvl5pPr marL="2057400" indent="-228600" algn="l" defTabSz="914400" rtl="0" eaLnBrk="1" latinLnBrk="0" hangingPunct="1">
+              <a:lnSpc>
+                <a:spcPct val="90000"/>
+              </a:lnSpc>
+              <a:spcBef>
+                <a:spcPts val="500"/>
+              </a:spcBef>
+              <a:buFont typeface="Arial" panose="020B0604020202020204" pitchFamily="34" charset="0"/>
+              <a:buChar char="•"/>
+              <a:defRPr sz="1800" kern="1200">
+                <a:solidFill>
+                  <a:schemeClr val="bg1"/>
+                </a:solidFill>
+                <a:latin typeface="+mn-lt"/>
+                <a:ea typeface="+mn-ea"/>
+                <a:cs typeface="+mn-cs"/>
+              </a:defRPr>
+            </a:lvl5pPr>
+            <a:lvl6pPr marL="2514600" indent="-228600" algn="l" defTabSz="914400" rtl="0" eaLnBrk="1" latinLnBrk="0" hangingPunct="1">
+              <a:lnSpc>
+                <a:spcPct val="90000"/>
+              </a:lnSpc>
+              <a:spcBef>
+                <a:spcPts val="500"/>
+              </a:spcBef>
+              <a:buFont typeface="Arial" panose="020B0604020202020204" pitchFamily="34" charset="0"/>
+              <a:buChar char="•"/>
+              <a:defRPr sz="1800" kern="1200">
+                <a:solidFill>
+                  <a:schemeClr val="tx1"/>
+                </a:solidFill>
+                <a:latin typeface="+mn-lt"/>
+                <a:ea typeface="+mn-ea"/>
+                <a:cs typeface="+mn-cs"/>
+              </a:defRPr>
+            </a:lvl6pPr>
+            <a:lvl7pPr marL="2971800" indent="-228600" algn="l" defTabSz="914400" rtl="0" eaLnBrk="1" latinLnBrk="0" hangingPunct="1">
+              <a:lnSpc>
+                <a:spcPct val="90000"/>
+              </a:lnSpc>
+              <a:spcBef>
+                <a:spcPts val="500"/>
+              </a:spcBef>
+              <a:buFont typeface="Arial" panose="020B0604020202020204" pitchFamily="34" charset="0"/>
+              <a:buChar char="•"/>
+              <a:defRPr sz="1800" kern="1200">
+                <a:solidFill>
+                  <a:schemeClr val="tx1"/>
+                </a:solidFill>
+                <a:latin typeface="+mn-lt"/>
+                <a:ea typeface="+mn-ea"/>
+                <a:cs typeface="+mn-cs"/>
+              </a:defRPr>
+            </a:lvl7pPr>
+            <a:lvl8pPr marL="3429000" indent="-228600" algn="l" defTabSz="914400" rtl="0" eaLnBrk="1" latinLnBrk="0" hangingPunct="1">
+              <a:lnSpc>
+                <a:spcPct val="90000"/>
+              </a:lnSpc>
+              <a:spcBef>
+                <a:spcPts val="500"/>
+              </a:spcBef>
+              <a:buFont typeface="Arial" panose="020B0604020202020204" pitchFamily="34" charset="0"/>
+              <a:buChar char="•"/>
+              <a:defRPr sz="1800" kern="1200">
+                <a:solidFill>
+                  <a:schemeClr val="tx1"/>
+                </a:solidFill>
+                <a:latin typeface="+mn-lt"/>
+                <a:ea typeface="+mn-ea"/>
+                <a:cs typeface="+mn-cs"/>
+              </a:defRPr>
+            </a:lvl8pPr>
+            <a:lvl9pPr marL="3886200" indent="-228600" algn="l" defTabSz="914400" rtl="0" eaLnBrk="1" latinLnBrk="0" hangingPunct="1">
+              <a:lnSpc>
+                <a:spcPct val="90000"/>
+              </a:lnSpc>
+              <a:spcBef>
+                <a:spcPts val="500"/>
+              </a:spcBef>
+              <a:buFont typeface="Arial" panose="020B0604020202020204" pitchFamily="34" charset="0"/>
+              <a:buChar char="•"/>
+              <a:defRPr sz="1800" kern="1200">
+                <a:solidFill>
+                  <a:schemeClr val="tx1"/>
+                </a:solidFill>
+                <a:latin typeface="+mn-lt"/>
+                <a:ea typeface="+mn-ea"/>
+                <a:cs typeface="+mn-cs"/>
+              </a:defRPr>
+            </a:lvl9pPr>
+          </a:lstStyle>
+          <a:p>
+            <a:r>
+              <a:rPr lang="lt-LT" dirty="0" smtClean="0"/>
+              <a:t>Išvados</a:t>
+            </a:r>
+            <a:r>
+              <a:rPr lang="en-US" dirty="0" smtClean="0"/>
+              <a:t> (2)</a:t>
+            </a:r>
+            <a:endParaRPr lang="en-US" dirty="0"/>
+          </a:p>
+          <a:p>
+            <a:endParaRPr lang="en-US" dirty="0"/>
+          </a:p>
+        </p:txBody>
+      </p:sp>
+      <p:pic>
+        <p:nvPicPr>
+          <p:cNvPr id="5" name="Picture 4">
+            <a:extLst>
+              <a:ext uri="{FF2B5EF4-FFF2-40B4-BE49-F238E27FC236}">
+                <a16:creationId xmlns:a16="http://schemas.microsoft.com/office/drawing/2014/main" id="{8564B338-5940-4748-8658-FA919808CB61}"/>
+              </a:ext>
+            </a:extLst>
+          </p:cNvPr>
+          <p:cNvPicPr>
+            <a:picLocks noChangeAspect="1"/>
+          </p:cNvPicPr>
+          <p:nvPr/>
+        </p:nvPicPr>
+        <p:blipFill>
+          <a:blip r:embed="rId2"/>
+          <a:stretch>
+            <a:fillRect/>
+          </a:stretch>
+        </p:blipFill>
+        <p:spPr>
+          <a:xfrm>
+            <a:off x="0" y="1351225"/>
+            <a:ext cx="12192000" cy="190500"/>
+          </a:xfrm>
+          <a:prstGeom prst="rect">
+            <a:avLst/>
+          </a:prstGeom>
+        </p:spPr>
+      </p:pic>
+      <p:pic>
+        <p:nvPicPr>
+          <p:cNvPr id="6" name="Picture 5">
+            <a:extLst>
+              <a:ext uri="{FF2B5EF4-FFF2-40B4-BE49-F238E27FC236}">
+                <a16:creationId xmlns:a16="http://schemas.microsoft.com/office/drawing/2014/main" id="{160257F0-5B45-1D4F-9B98-CE7BE09D9121}"/>
+              </a:ext>
+            </a:extLst>
+          </p:cNvPr>
+          <p:cNvPicPr>
+            <a:picLocks noChangeAspect="1"/>
+          </p:cNvPicPr>
+          <p:nvPr/>
+        </p:nvPicPr>
+        <p:blipFill>
+          <a:blip r:embed="rId3"/>
+          <a:stretch>
+            <a:fillRect/>
+          </a:stretch>
+        </p:blipFill>
+        <p:spPr>
+          <a:xfrm>
+            <a:off x="11163044" y="696317"/>
+            <a:ext cx="590984" cy="318475"/>
+          </a:xfrm>
+          <a:prstGeom prst="rect">
+            <a:avLst/>
+          </a:prstGeom>
+        </p:spPr>
+      </p:pic>
+      <p:sp>
+        <p:nvSpPr>
+          <p:cNvPr id="7" name="Slide Number Placeholder 3">
+            <a:extLst>
+              <a:ext uri="{FF2B5EF4-FFF2-40B4-BE49-F238E27FC236}">
+                <a16:creationId xmlns:a16="http://schemas.microsoft.com/office/drawing/2014/main" id="{3D74F31B-F395-4A45-B188-7BD99A6C9625}"/>
+              </a:ext>
+            </a:extLst>
+          </p:cNvPr>
+          <p:cNvSpPr txBox="1">
+            <a:spLocks/>
+          </p:cNvSpPr>
+          <p:nvPr/>
+        </p:nvSpPr>
+        <p:spPr>
+          <a:xfrm>
+            <a:off x="11163044" y="6286367"/>
+            <a:ext cx="922601" cy="365125"/>
+          </a:xfrm>
+          <a:prstGeom prst="rect">
+            <a:avLst/>
+          </a:prstGeom>
+        </p:spPr>
+        <p:txBody>
+          <a:bodyPr anchor="b"/>
+          <a:lstStyle>
+            <a:defPPr>
+              <a:defRPr lang="en-US"/>
+            </a:defPPr>
+            <a:lvl1pPr marL="0" algn="r" defTabSz="914400" rtl="0" eaLnBrk="1" latinLnBrk="0" hangingPunct="1">
+              <a:defRPr sz="1500" b="1" i="0" kern="1200">
+                <a:solidFill>
+                  <a:schemeClr val="bg1"/>
+                </a:solidFill>
+                <a:latin typeface="Arial" panose="020B0604020202020204" pitchFamily="34" charset="0"/>
+                <a:ea typeface="+mn-ea"/>
+                <a:cs typeface="Arial" panose="020B0604020202020204" pitchFamily="34" charset="0"/>
+              </a:defRPr>
+            </a:lvl1pPr>
+            <a:lvl2pPr marL="457200" algn="l" defTabSz="914400" rtl="0" eaLnBrk="1" latinLnBrk="0" hangingPunct="1">
+              <a:defRPr sz="1800" kern="1200">
+                <a:solidFill>
+                  <a:schemeClr val="tx1"/>
+                </a:solidFill>
+                <a:latin typeface="+mn-lt"/>
+                <a:ea typeface="+mn-ea"/>
+                <a:cs typeface="+mn-cs"/>
+              </a:defRPr>
+            </a:lvl2pPr>
+            <a:lvl3pPr marL="914400" algn="l" defTabSz="914400" rtl="0" eaLnBrk="1" latinLnBrk="0" hangingPunct="1">
+              <a:defRPr sz="1800" kern="1200">
+                <a:solidFill>
+                  <a:schemeClr val="tx1"/>
+                </a:solidFill>
+                <a:latin typeface="+mn-lt"/>
+                <a:ea typeface="+mn-ea"/>
+                <a:cs typeface="+mn-cs"/>
+              </a:defRPr>
+            </a:lvl3pPr>
+            <a:lvl4pPr marL="1371600" algn="l" defTabSz="914400" rtl="0" eaLnBrk="1" latinLnBrk="0" hangingPunct="1">
+              <a:defRPr sz="1800" kern="1200">
+                <a:solidFill>
+                  <a:schemeClr val="tx1"/>
+                </a:solidFill>
+                <a:latin typeface="+mn-lt"/>
+                <a:ea typeface="+mn-ea"/>
+                <a:cs typeface="+mn-cs"/>
+              </a:defRPr>
+            </a:lvl4pPr>
+            <a:lvl5pPr marL="1828800" algn="l" defTabSz="914400" rtl="0" eaLnBrk="1" latinLnBrk="0" hangingPunct="1">
+              <a:defRPr sz="1800" kern="1200">
+                <a:solidFill>
+                  <a:schemeClr val="tx1"/>
+                </a:solidFill>
+                <a:latin typeface="+mn-lt"/>
+                <a:ea typeface="+mn-ea"/>
+                <a:cs typeface="+mn-cs"/>
+              </a:defRPr>
+            </a:lvl5pPr>
+            <a:lvl6pPr marL="2286000" algn="l" defTabSz="914400" rtl="0" eaLnBrk="1" latinLnBrk="0" hangingPunct="1">
+              <a:defRPr sz="1800" kern="1200">
+                <a:solidFill>
+                  <a:schemeClr val="tx1"/>
+                </a:solidFill>
+                <a:latin typeface="+mn-lt"/>
+                <a:ea typeface="+mn-ea"/>
+                <a:cs typeface="+mn-cs"/>
+              </a:defRPr>
+            </a:lvl6pPr>
+            <a:lvl7pPr marL="2743200" algn="l" defTabSz="914400" rtl="0" eaLnBrk="1" latinLnBrk="0" hangingPunct="1">
+              <a:defRPr sz="1800" kern="1200">
+                <a:solidFill>
+                  <a:schemeClr val="tx1"/>
+                </a:solidFill>
+                <a:latin typeface="+mn-lt"/>
+                <a:ea typeface="+mn-ea"/>
+                <a:cs typeface="+mn-cs"/>
+              </a:defRPr>
+            </a:lvl7pPr>
+            <a:lvl8pPr marL="3200400" algn="l" defTabSz="914400" rtl="0" eaLnBrk="1" latinLnBrk="0" hangingPunct="1">
+              <a:defRPr sz="1800" kern="1200">
+                <a:solidFill>
+                  <a:schemeClr val="tx1"/>
+                </a:solidFill>
+                <a:latin typeface="+mn-lt"/>
+                <a:ea typeface="+mn-ea"/>
+                <a:cs typeface="+mn-cs"/>
+              </a:defRPr>
+            </a:lvl8pPr>
+            <a:lvl9pPr marL="3657600" algn="l" defTabSz="914400" rtl="0" eaLnBrk="1" latinLnBrk="0" hangingPunct="1">
+              <a:defRPr sz="1800" kern="1200">
+                <a:solidFill>
+                  <a:schemeClr val="tx1"/>
+                </a:solidFill>
+                <a:latin typeface="+mn-lt"/>
+                <a:ea typeface="+mn-ea"/>
+                <a:cs typeface="+mn-cs"/>
+              </a:defRPr>
+            </a:lvl9pPr>
+          </a:lstStyle>
+          <a:p>
+            <a:pPr algn="ctr"/>
+            <a:fld id="{D6F01323-A656-431B-B19E-EE6A8E2AF848}" type="slidenum">
+              <a:rPr lang="en-US" sz="1400" b="1" i="0" smtClean="0">
+                <a:solidFill>
+                  <a:schemeClr val="tx1"/>
+                </a:solidFill>
+                <a:latin typeface="Arial" panose="020B0604020202020204" pitchFamily="34" charset="0"/>
+                <a:ea typeface="Inter Semi Bold" panose="020B0502030000000004" pitchFamily="34" charset="0"/>
+                <a:cs typeface="Arial" panose="020B0604020202020204" pitchFamily="34" charset="0"/>
+              </a:rPr>
+              <a:pPr algn="ctr"/>
+              <a:t>16</a:t>
+            </a:fld>
+            <a:endParaRPr lang="en-US" sz="1400" b="1" i="0" dirty="0">
+              <a:solidFill>
+                <a:schemeClr val="tx1"/>
+              </a:solidFill>
+              <a:latin typeface="Arial" panose="020B0604020202020204" pitchFamily="34" charset="0"/>
+              <a:ea typeface="Inter Semi Bold" panose="020B0502030000000004" pitchFamily="34" charset="0"/>
+              <a:cs typeface="Arial" panose="020B0604020202020204" pitchFamily="34" charset="0"/>
+            </a:endParaRPr>
+          </a:p>
+        </p:txBody>
+      </p:sp>
+      <p:sp>
+        <p:nvSpPr>
+          <p:cNvPr id="9" name="Text Placeholder 5">
+            <a:extLst>
+              <a:ext uri="{FF2B5EF4-FFF2-40B4-BE49-F238E27FC236}">
+                <a16:creationId xmlns:a16="http://schemas.microsoft.com/office/drawing/2014/main" id="{278D5CDE-EE26-4348-B09D-C90DC0AC6CAF}"/>
+              </a:ext>
+            </a:extLst>
+          </p:cNvPr>
+          <p:cNvSpPr txBox="1">
+            <a:spLocks/>
+          </p:cNvSpPr>
+          <p:nvPr/>
+        </p:nvSpPr>
+        <p:spPr>
+          <a:xfrm>
+            <a:off x="641645" y="1690277"/>
+            <a:ext cx="10839155" cy="4961215"/>
+          </a:xfrm>
+          <a:prstGeom prst="rect">
+            <a:avLst/>
+          </a:prstGeom>
+        </p:spPr>
+        <p:txBody>
+          <a:bodyPr/>
+          <a:lstStyle>
+            <a:lvl1pPr marL="360000" indent="-360000" algn="l" defTabSz="914400" rtl="0" eaLnBrk="1" latinLnBrk="0" hangingPunct="1">
+              <a:lnSpc>
+                <a:spcPct val="110000"/>
+              </a:lnSpc>
+              <a:spcBef>
+                <a:spcPts val="1200"/>
+              </a:spcBef>
+              <a:buClr>
+                <a:srgbClr val="FFFF00"/>
+              </a:buClr>
+              <a:buFont typeface="+mj-lt"/>
+              <a:buAutoNum type="arabicPeriod"/>
+              <a:defRPr sz="2000" b="0" i="0" kern="1200">
+                <a:solidFill>
+                  <a:schemeClr val="bg1"/>
+                </a:solidFill>
+                <a:latin typeface="Arial" panose="020B0604020202020204" pitchFamily="34" charset="0"/>
+                <a:ea typeface="Inter Medium" panose="020B0502030000000004" pitchFamily="34" charset="0"/>
+                <a:cs typeface="Arial" panose="020B0604020202020204" pitchFamily="34" charset="0"/>
+              </a:defRPr>
+            </a:lvl1pPr>
+            <a:lvl2pPr marL="685800" indent="-228600" algn="l" defTabSz="914400" rtl="0" eaLnBrk="1" latinLnBrk="0" hangingPunct="1">
+              <a:lnSpc>
+                <a:spcPct val="90000"/>
+              </a:lnSpc>
+              <a:spcBef>
+                <a:spcPts val="500"/>
+              </a:spcBef>
+              <a:buFont typeface="Arial" panose="020B0604020202020204" pitchFamily="34" charset="0"/>
+              <a:buChar char="•"/>
+              <a:defRPr sz="2400" kern="1200">
+                <a:solidFill>
+                  <a:schemeClr val="tx1"/>
+                </a:solidFill>
+                <a:latin typeface="+mn-lt"/>
+                <a:ea typeface="+mn-ea"/>
+                <a:cs typeface="+mn-cs"/>
+              </a:defRPr>
+            </a:lvl2pPr>
+            <a:lvl3pPr marL="1143000" indent="-228600" algn="l" defTabSz="914400" rtl="0" eaLnBrk="1" latinLnBrk="0" hangingPunct="1">
+              <a:lnSpc>
+                <a:spcPct val="90000"/>
+              </a:lnSpc>
+              <a:spcBef>
+                <a:spcPts val="500"/>
+              </a:spcBef>
+              <a:buFont typeface="Arial" panose="020B0604020202020204" pitchFamily="34" charset="0"/>
+              <a:buChar char="•"/>
+              <a:defRPr sz="2000" kern="1200">
+                <a:solidFill>
+                  <a:schemeClr val="tx1"/>
+                </a:solidFill>
+                <a:latin typeface="+mn-lt"/>
+                <a:ea typeface="+mn-ea"/>
+                <a:cs typeface="+mn-cs"/>
+              </a:defRPr>
+            </a:lvl3pPr>
+            <a:lvl4pPr marL="1600200" indent="-228600" algn="l" defTabSz="914400" rtl="0" eaLnBrk="1" latinLnBrk="0" hangingPunct="1">
+              <a:lnSpc>
+                <a:spcPct val="90000"/>
+              </a:lnSpc>
+              <a:spcBef>
+                <a:spcPts val="500"/>
+              </a:spcBef>
+              <a:buFont typeface="Arial" panose="020B0604020202020204" pitchFamily="34" charset="0"/>
+              <a:buChar char="•"/>
+              <a:defRPr sz="1800" kern="1200">
+                <a:solidFill>
+                  <a:schemeClr val="tx1"/>
+                </a:solidFill>
+                <a:latin typeface="+mn-lt"/>
+                <a:ea typeface="+mn-ea"/>
+                <a:cs typeface="+mn-cs"/>
+              </a:defRPr>
+            </a:lvl4pPr>
+            <a:lvl5pPr marL="2057400" indent="-228600" algn="l" defTabSz="914400" rtl="0" eaLnBrk="1" latinLnBrk="0" hangingPunct="1">
+              <a:lnSpc>
+                <a:spcPct val="90000"/>
+              </a:lnSpc>
+              <a:spcBef>
+                <a:spcPts val="500"/>
+              </a:spcBef>
+              <a:buFont typeface="Arial" panose="020B0604020202020204" pitchFamily="34" charset="0"/>
+              <a:buChar char="•"/>
+              <a:defRPr sz="1800" kern="1200">
+                <a:solidFill>
+                  <a:schemeClr val="tx1"/>
+                </a:solidFill>
+                <a:latin typeface="+mn-lt"/>
+                <a:ea typeface="+mn-ea"/>
+                <a:cs typeface="+mn-cs"/>
+              </a:defRPr>
+            </a:lvl5pPr>
+            <a:lvl6pPr marL="2514600" indent="-228600" algn="l" defTabSz="914400" rtl="0" eaLnBrk="1" latinLnBrk="0" hangingPunct="1">
+              <a:lnSpc>
+                <a:spcPct val="90000"/>
+              </a:lnSpc>
+              <a:spcBef>
+                <a:spcPts val="500"/>
+              </a:spcBef>
+              <a:buFont typeface="Arial" panose="020B0604020202020204" pitchFamily="34" charset="0"/>
+              <a:buChar char="•"/>
+              <a:defRPr sz="1800" kern="1200">
+                <a:solidFill>
+                  <a:schemeClr val="tx1"/>
+                </a:solidFill>
+                <a:latin typeface="+mn-lt"/>
+                <a:ea typeface="+mn-ea"/>
+                <a:cs typeface="+mn-cs"/>
+              </a:defRPr>
+            </a:lvl6pPr>
+            <a:lvl7pPr marL="2971800" indent="-228600" algn="l" defTabSz="914400" rtl="0" eaLnBrk="1" latinLnBrk="0" hangingPunct="1">
+              <a:lnSpc>
+                <a:spcPct val="90000"/>
+              </a:lnSpc>
+              <a:spcBef>
+                <a:spcPts val="500"/>
+              </a:spcBef>
+              <a:buFont typeface="Arial" panose="020B0604020202020204" pitchFamily="34" charset="0"/>
+              <a:buChar char="•"/>
+              <a:defRPr sz="1800" kern="1200">
+                <a:solidFill>
+                  <a:schemeClr val="tx1"/>
+                </a:solidFill>
+                <a:latin typeface="+mn-lt"/>
+                <a:ea typeface="+mn-ea"/>
+                <a:cs typeface="+mn-cs"/>
+              </a:defRPr>
+            </a:lvl7pPr>
+            <a:lvl8pPr marL="3429000" indent="-228600" algn="l" defTabSz="914400" rtl="0" eaLnBrk="1" latinLnBrk="0" hangingPunct="1">
+              <a:lnSpc>
+                <a:spcPct val="90000"/>
+              </a:lnSpc>
+              <a:spcBef>
+                <a:spcPts val="500"/>
+              </a:spcBef>
+              <a:buFont typeface="Arial" panose="020B0604020202020204" pitchFamily="34" charset="0"/>
+              <a:buChar char="•"/>
+              <a:defRPr sz="1800" kern="1200">
+                <a:solidFill>
+                  <a:schemeClr val="tx1"/>
+                </a:solidFill>
+                <a:latin typeface="+mn-lt"/>
+                <a:ea typeface="+mn-ea"/>
+                <a:cs typeface="+mn-cs"/>
+              </a:defRPr>
+            </a:lvl8pPr>
+            <a:lvl9pPr marL="3886200" indent="-228600" algn="l" defTabSz="914400" rtl="0" eaLnBrk="1" latinLnBrk="0" hangingPunct="1">
+              <a:lnSpc>
+                <a:spcPct val="90000"/>
+              </a:lnSpc>
+              <a:spcBef>
+                <a:spcPts val="500"/>
+              </a:spcBef>
+              <a:buFont typeface="Arial" panose="020B0604020202020204" pitchFamily="34" charset="0"/>
+              <a:buChar char="•"/>
+              <a:defRPr sz="1800" kern="1200">
+                <a:solidFill>
+                  <a:schemeClr val="tx1"/>
+                </a:solidFill>
+                <a:latin typeface="+mn-lt"/>
+                <a:ea typeface="+mn-ea"/>
+                <a:cs typeface="+mn-cs"/>
+              </a:defRPr>
+            </a:lvl9pPr>
+          </a:lstStyle>
+          <a:p>
+            <a:pPr marL="342900" indent="-342900">
+              <a:buFont typeface="Arial" panose="020B0604020202020204" pitchFamily="34" charset="0"/>
+              <a:buChar char="•"/>
+            </a:pPr>
+            <a:r>
+              <a:rPr lang="lt-LT" dirty="0" smtClean="0">
+                <a:solidFill>
+                  <a:schemeClr val="tx1"/>
+                </a:solidFill>
+              </a:rPr>
+              <a:t>Sistema </a:t>
+            </a:r>
+            <a:r>
+              <a:rPr lang="lt-LT" dirty="0">
+                <a:solidFill>
+                  <a:schemeClr val="tx1"/>
+                </a:solidFill>
+              </a:rPr>
+              <a:t>padalyta į naudotojo sąsają, serverio dalį ir duomenų bazę, todėl aiškiai atskirtos pagrindinės atsakomybės. Naudotojo sąsajoje atliekami administravimo veiksmai, serverio dalyje vykdoma </a:t>
+            </a:r>
+            <a:r>
+              <a:rPr lang="lt-LT" dirty="0" err="1">
+                <a:solidFill>
+                  <a:schemeClr val="tx1"/>
+                </a:solidFill>
+              </a:rPr>
+              <a:t>validacija</a:t>
+            </a:r>
+            <a:r>
+              <a:rPr lang="lt-LT" dirty="0">
+                <a:solidFill>
+                  <a:schemeClr val="tx1"/>
+                </a:solidFill>
+              </a:rPr>
+              <a:t> ir skaičiavimai, o duomenų bazėje saugoma turnyrų informacija</a:t>
+            </a:r>
+            <a:r>
+              <a:rPr lang="lt-LT" dirty="0" smtClean="0">
+                <a:solidFill>
+                  <a:schemeClr val="tx1"/>
+                </a:solidFill>
+              </a:rPr>
+              <a:t>.</a:t>
+            </a:r>
+            <a:endParaRPr lang="lt-LT" dirty="0">
+              <a:solidFill>
+                <a:schemeClr val="tx1"/>
+              </a:solidFill>
+            </a:endParaRPr>
+          </a:p>
+          <a:p>
+            <a:pPr marL="342900" indent="-342900">
+              <a:buFont typeface="Arial" panose="020B0604020202020204" pitchFamily="34" charset="0"/>
+              <a:buChar char="•"/>
+            </a:pPr>
+            <a:r>
+              <a:rPr lang="lt-LT" dirty="0">
+                <a:solidFill>
+                  <a:schemeClr val="tx1"/>
+                </a:solidFill>
+              </a:rPr>
+              <a:t>Pagrindinė serverio logika patikrinta vienetų testais, o prisijungimo, rolių, paraiškų ir duomenų keitimo scenarijai – integraciniais bei naudotojo sąsajos testais. Tai leido patikrinti tiek atskiras logikos dalis, tiek svarbiausius naudotojo veiksmus sistemoje</a:t>
+            </a:r>
+            <a:r>
+              <a:rPr lang="lt-LT" dirty="0" smtClean="0">
+                <a:solidFill>
+                  <a:schemeClr val="tx1"/>
+                </a:solidFill>
+              </a:rPr>
+              <a:t>.</a:t>
+            </a:r>
+            <a:endParaRPr lang="lt-LT" dirty="0">
+              <a:solidFill>
+                <a:schemeClr val="tx1"/>
+              </a:solidFill>
+            </a:endParaRPr>
+          </a:p>
+          <a:p>
+            <a:pPr marL="342900" indent="-342900">
+              <a:buFont typeface="Arial" panose="020B0604020202020204" pitchFamily="34" charset="0"/>
+              <a:buChar char="•"/>
+            </a:pPr>
+            <a:r>
+              <a:rPr lang="lt-LT" dirty="0">
+                <a:solidFill>
+                  <a:schemeClr val="tx1"/>
+                </a:solidFill>
+              </a:rPr>
+              <a:t>Sukurta veikianti internetinė sistema, leidžianti vienoje vietoje valdyti turnyrus, komandas, paraiškas, tvarkaraštį, rezultatus, lenteles ir atkrintamąsias. Darbo tikslas – sumažinti rankinio administravimo poreikį ir pagerinti turnyro duomenų valdymą – buvo pasiektas pradinei sistemos versijai numatyta apimtimi.</a:t>
+            </a:r>
+          </a:p>
+        </p:txBody>
+      </p:sp>
+    </p:spTree>
+    <p:extLst>
+      <p:ext uri="{BB962C8B-B14F-4D97-AF65-F5344CB8AC3E}">
+        <p14:creationId xmlns:p14="http://schemas.microsoft.com/office/powerpoint/2010/main" val="1875618017"/>
       </p:ext>
     </p:extLst>
   </p:cSld>
@@ -38326,14 +39096,14 @@
           <p:nvPr>
             <p:extLst>
               <p:ext uri="{D42A27DB-BD31-4B8C-83A1-F6EECF244321}">
-                <p14:modId xmlns:p14="http://schemas.microsoft.com/office/powerpoint/2010/main" val="137751263"/>
+                <p14:modId xmlns:p14="http://schemas.microsoft.com/office/powerpoint/2010/main" val="1676453002"/>
               </p:ext>
             </p:extLst>
           </p:nvPr>
         </p:nvGraphicFramePr>
         <p:xfrm>
           <a:off x="489109" y="1571624"/>
-          <a:ext cx="10160940" cy="4810760"/>
+          <a:ext cx="10160940" cy="4277360"/>
         </p:xfrm>
         <a:graphic>
           <a:graphicData uri="http://schemas.openxmlformats.org/drawingml/2006/table">
@@ -38579,108 +39349,6 @@
                 <a:extLst>
                   <a:ext uri="{0D108BD9-81ED-4DB2-BD59-A6C34878D82A}">
                     <a16:rowId xmlns:a16="http://schemas.microsoft.com/office/drawing/2014/main" val="1849515585"/>
-                  </a:ext>
-                </a:extLst>
-              </a:tr>
-              <a:tr h="533400">
-                <a:tc>
-                  <a:txBody>
-                    <a:bodyPr/>
-                    <a:lstStyle/>
-                    <a:p>
-                      <a:r>
-                        <a:rPr lang="lt-LT" sz="1600" dirty="0" smtClean="0"/>
-                        <a:t>Žaidėjų valdymas</a:t>
-                      </a:r>
-                      <a:endParaRPr lang="lt-LT" sz="1600" dirty="0">
-                        <a:solidFill>
-                          <a:srgbClr val="222222"/>
-                        </a:solidFill>
-                        <a:latin typeface="Arial" panose="020B0604020202020204" pitchFamily="34" charset="0"/>
-                      </a:endParaRPr>
-                    </a:p>
-                  </a:txBody>
-                  <a:tcPr marL="50800" marR="50800" marT="25400" marB="25400"/>
-                </a:tc>
-                <a:tc>
-                  <a:txBody>
-                    <a:bodyPr/>
-                    <a:lstStyle/>
-                    <a:p>
-                      <a:r>
-                        <a:rPr lang="lt-LT" sz="1600" dirty="0" smtClean="0"/>
-                        <a:t>Yra</a:t>
-                      </a:r>
-                      <a:endParaRPr lang="lt-LT" sz="1600" dirty="0">
-                        <a:solidFill>
-                          <a:srgbClr val="222222"/>
-                        </a:solidFill>
-                        <a:latin typeface="Arial" panose="020B0604020202020204" pitchFamily="34" charset="0"/>
-                      </a:endParaRPr>
-                    </a:p>
-                  </a:txBody>
-                  <a:tcPr marL="50800" marR="50800" marT="25400" marB="25400"/>
-                </a:tc>
-                <a:tc>
-                  <a:txBody>
-                    <a:bodyPr/>
-                    <a:lstStyle/>
-                    <a:p>
-                      <a:r>
-                        <a:rPr lang="lt-LT" sz="1600" smtClean="0"/>
-                        <a:t>Yra</a:t>
-                      </a:r>
-                      <a:endParaRPr lang="lt-LT" sz="1600">
-                        <a:solidFill>
-                          <a:srgbClr val="222222"/>
-                        </a:solidFill>
-                        <a:latin typeface="Arial" panose="020B0604020202020204" pitchFamily="34" charset="0"/>
-                      </a:endParaRPr>
-                    </a:p>
-                  </a:txBody>
-                  <a:tcPr marL="50800" marR="50800" marT="25400" marB="25400"/>
-                </a:tc>
-                <a:tc>
-                  <a:txBody>
-                    <a:bodyPr/>
-                    <a:lstStyle/>
-                    <a:p>
-                      <a:r>
-                        <a:rPr lang="lt-LT" sz="1600" smtClean="0"/>
-                        <a:t>Nėra</a:t>
-                      </a:r>
-                      <a:endParaRPr lang="lt-LT" sz="1600">
-                        <a:solidFill>
-                          <a:srgbClr val="222222"/>
-                        </a:solidFill>
-                        <a:latin typeface="Arial" panose="020B0604020202020204" pitchFamily="34" charset="0"/>
-                      </a:endParaRPr>
-                    </a:p>
-                  </a:txBody>
-                  <a:tcPr marL="50800" marR="50800" marT="25400" marB="25400"/>
-                </a:tc>
-                <a:tc>
-                  <a:txBody>
-                    <a:bodyPr/>
-                    <a:lstStyle/>
-                    <a:p>
-                      <a:r>
-                        <a:rPr lang="lt-LT" sz="1600" dirty="0" smtClean="0"/>
-                        <a:t>Yra</a:t>
-                      </a:r>
-                      <a:endParaRPr lang="lt-LT" sz="1600" b="1" dirty="0">
-                        <a:solidFill>
-                          <a:srgbClr val="222222"/>
-                        </a:solidFill>
-                        <a:latin typeface="Arial" panose="020B0604020202020204" pitchFamily="34" charset="0"/>
-                      </a:endParaRPr>
-                    </a:p>
-                  </a:txBody>
-                  <a:tcPr marL="50800" marR="50800" marT="25400" marB="25400"/>
-                </a:tc>
-                <a:extLst>
-                  <a:ext uri="{0D108BD9-81ED-4DB2-BD59-A6C34878D82A}">
-                    <a16:rowId xmlns:a16="http://schemas.microsoft.com/office/drawing/2014/main" val="2221623036"/>
                   </a:ext>
                 </a:extLst>
               </a:tr>
@@ -39557,7 +40225,19 @@
             </a:r>
             <a:r>
               <a:rPr lang="en-US" dirty="0"/>
-              <a:t> diagram (1)</a:t>
+              <a:t> </a:t>
+            </a:r>
+            <a:r>
+              <a:rPr lang="en-US" dirty="0" err="1" smtClean="0"/>
+              <a:t>diagrama</a:t>
+            </a:r>
+            <a:r>
+              <a:rPr lang="en-US" dirty="0" smtClean="0"/>
+              <a:t> </a:t>
+            </a:r>
+            <a:r>
+              <a:rPr lang="en-US" dirty="0"/>
+              <a:t>(1)</a:t>
             </a:r>
           </a:p>
         </p:txBody>
@@ -40032,11 +40712,15 @@
             </a:r>
             <a:r>
               <a:rPr lang="en-US" dirty="0"/>
-              <a:t> diagram </a:t>
+              <a:t> </a:t>
+            </a:r>
+            <a:r>
+              <a:rPr lang="en-US" dirty="0" err="1" smtClean="0"/>
+              <a:t>diagrama</a:t>
             </a:r>
             <a:r>
               <a:rPr lang="en-US" dirty="0" smtClean="0"/>
-              <a:t>(2)</a:t>
+              <a:t> (2)</a:t>
             </a:r>
             <a:endParaRPr lang="en-US" dirty="0"/>
           </a:p>
@@ -40512,11 +41196,15 @@
             </a:r>
             <a:r>
               <a:rPr lang="en-US" dirty="0"/>
-              <a:t> diagram </a:t>
+              <a:t> </a:t>
+            </a:r>
+            <a:r>
+              <a:rPr lang="en-US" dirty="0" err="1" smtClean="0"/>
+              <a:t>diagrama</a:t>
             </a:r>
             <a:r>
               <a:rPr lang="en-US" dirty="0" smtClean="0"/>
-              <a:t>(3)</a:t>
+              <a:t> (3)</a:t>
             </a:r>
             <a:endParaRPr lang="en-US" dirty="0"/>
           </a:p>
